--- a/tools/attendance_dashboard/docs/勤務実績ダッシュボード_運用ガイド.pptx
+++ b/tools/attendance_dashboard/docs/勤務実績ダッシュボード_運用ガイド.pptx
@@ -3795,7 +3795,7 @@
         <p:spPr>
           <a:xfrm>
             <a:off x="3405336" y="3463975"/>
-            <a:ext cx="3722638" cy="775543"/>
+            <a:ext cx="3722638" cy="589359"/>
           </a:xfrm>
           <a:prstGeom prst="rect">
             <a:avLst/>
@@ -3811,7 +3811,7 @@
         <p:spPr>
           <a:xfrm>
             <a:off x="3405336" y="3463975"/>
-            <a:ext cx="3722638" cy="775543"/>
+            <a:ext cx="3722638" cy="589359"/>
           </a:xfrm>
           <a:prstGeom prst="rect">
             <a:avLst/>
@@ -3833,7 +3833,7 @@
         </p:nvSpPr>
         <p:spPr>
           <a:xfrm>
-            <a:off x="3405336" y="4268242"/>
+            <a:off x="3405336" y="4082058"/>
             <a:ext cx="3722638" cy="131118"/>
           </a:xfrm>
           <a:prstGeom prst="rect">
